--- a/Student_Result_Analyzer_Presentation.pptx
+++ b/Student_Result_Analyzer_Presentation.pptx
@@ -1609,8 +1609,8 @@
         </p:nvSpPr>
         <p:spPr>
           <a:xfrm>
-            <a:off x="1143225" y="685800"/>
-            <a:ext cx="4572225" cy="3429000"/>
+            <a:off x="381000" y="685800"/>
+            <a:ext cx="6096000" cy="3429000"/>
           </a:xfrm>
           <a:custGeom>
             <a:avLst/>
@@ -20616,7 +20616,7 @@
         <p:spPr>
           <a:xfrm>
             <a:off x="962025" y="1838325"/>
-            <a:ext cx="2124075" cy="400050"/>
+            <a:ext cx="2124075" cy="484748"/>
           </a:xfrm>
           <a:prstGeom prst="rect">
             <a:avLst/>
@@ -20645,18 +20645,14 @@
               <a:buNone/>
             </a:pPr>
             <a:r>
-              <a:rPr lang="en-US" sz="3150" b="0" i="0" u="none" strike="noStrike" cap="none">
+              <a:rPr lang="en-US" sz="3150" dirty="0">
                 <a:solidFill>
                   <a:srgbClr val="0F172A"/>
                 </a:solidFill>
-                <a:latin typeface="Arial"/>
-                <a:ea typeface="Arial"/>
-                <a:cs typeface="Arial"/>
-                <a:sym typeface="Arial"/>
               </a:rPr>
-              <a:t>25</a:t>
+              <a:t>50</a:t>
             </a:r>
-            <a:endParaRPr/>
+            <a:endParaRPr dirty="0"/>
           </a:p>
         </p:txBody>
       </p:sp>
@@ -20719,7 +20715,7 @@
         <p:spPr>
           <a:xfrm>
             <a:off x="3676650" y="1838325"/>
-            <a:ext cx="2124075" cy="400050"/>
+            <a:ext cx="2124075" cy="484748"/>
           </a:xfrm>
           <a:prstGeom prst="rect">
             <a:avLst/>
@@ -20748,7 +20744,7 @@
               <a:buNone/>
             </a:pPr>
             <a:r>
-              <a:rPr lang="en-US" sz="3150" b="0" i="0" u="none" strike="noStrike" cap="none">
+              <a:rPr lang="en-US" sz="3150" b="0" i="0" u="none" strike="noStrike" cap="none" dirty="0">
                 <a:solidFill>
                   <a:srgbClr val="0F172A"/>
                 </a:solidFill>
@@ -20757,9 +20753,9 @@
                 <a:cs typeface="Arial"/>
                 <a:sym typeface="Arial"/>
               </a:rPr>
-              <a:t>84%</a:t>
+              <a:t>80%</a:t>
             </a:r>
-            <a:endParaRPr/>
+            <a:endParaRPr dirty="0"/>
           </a:p>
         </p:txBody>
       </p:sp>
@@ -20822,7 +20818,7 @@
         <p:spPr>
           <a:xfrm>
             <a:off x="6391275" y="1838325"/>
-            <a:ext cx="2124075" cy="400050"/>
+            <a:ext cx="2124075" cy="484748"/>
           </a:xfrm>
           <a:prstGeom prst="rect">
             <a:avLst/>
@@ -20851,7 +20847,15 @@
               <a:buNone/>
             </a:pPr>
             <a:r>
-              <a:rPr lang="en-US" sz="3150" b="0" i="0" u="none" strike="noStrike" cap="none">
+              <a:rPr lang="en-US" sz="3150" dirty="0">
+                <a:solidFill>
+                  <a:srgbClr val="0F172A"/>
+                </a:solidFill>
+              </a:rPr>
+              <a:t>20</a:t>
+            </a:r>
+            <a:r>
+              <a:rPr lang="en-US" sz="3150" b="0" i="0" u="none" strike="noStrike" cap="none" dirty="0">
                 <a:solidFill>
                   <a:srgbClr val="0F172A"/>
                 </a:solidFill>
@@ -20860,9 +20864,9 @@
                 <a:cs typeface="Arial"/>
                 <a:sym typeface="Arial"/>
               </a:rPr>
-              <a:t>16%</a:t>
+              <a:t>%</a:t>
             </a:r>
-            <a:endParaRPr/>
+            <a:endParaRPr dirty="0"/>
           </a:p>
         </p:txBody>
       </p:sp>
